--- a/media/resources/files/Ekvivalenettuuluk_Onduktardan_menen_Bolchoktor-BingoOyunu.pptx
+++ b/media/resources/files/Ekvivalenettuuluk_Onduktardan_menen_Bolchoktor-BingoOyunu.pptx
@@ -21048,7 +21048,7 @@
             </a:pPr>
             <a:r>
               <a:rPr lang="ru-RU" dirty="0"/>
-              <a:t>Турдуу пикирлер учун ыраазычылык билдиребиз.</a:t>
+              <a:t>Түрдүү пикирлер үчүн ыраазычылык билдиребиз.</a:t>
             </a:r>
           </a:p>
           <a:p>

--- a/media/resources/files/Ekvivalenettuuluk_Onduktardan_menen_Bolchoktor-BingoOyunu.pptx
+++ b/media/resources/files/Ekvivalenettuuluk_Onduktardan_menen_Bolchoktor-BingoOyunu.pptx
@@ -3683,7 +3683,7 @@
                 <a:ea typeface="+mn-ea"/>
                 <a:cs typeface="+mn-cs"/>
               </a:rPr>
-              <a:t>Бинго ,жооптору менен</a:t>
+              <a:t>Бинго,жооптору менен</a:t>
             </a:r>
             <a:endParaRPr kumimoji="0" lang="en-US" sz="1800" b="0" i="0" u="none" strike="noStrike" kern="1200" cap="none" spc="0" normalizeH="0" baseline="0" noProof="0" dirty="0">
               <a:ln>
@@ -3766,7 +3766,7 @@
                 <a:ea typeface="+mn-ea"/>
                 <a:cs typeface="+mn-cs"/>
               </a:rPr>
-              <a:t>Окуучулар </a:t>
+              <a:t>Окуучулар тордон тогуз жоопту тандап, дептердеги 3х3 чакмакка каалагандай коюшат.</a:t>
             </a:r>
             <a:r>
               <a:rPr kumimoji="0" lang="ru-RU" sz="2000" b="0" i="0" u="none" strike="noStrike" kern="1200" cap="none" spc="0" normalizeH="0" baseline="0" noProof="0" dirty="0">
@@ -3783,7 +3783,7 @@
                 <a:ea typeface="+mn-ea"/>
                 <a:cs typeface="+mn-cs"/>
               </a:rPr>
-              <a:t>суроо</a:t>
+              <a:t/>
             </a:r>
             <a:r>
               <a:rPr kumimoji="0" lang="en-US" sz="2000" b="0" i="0" u="none" strike="noStrike" kern="1200" cap="none" spc="0" normalizeH="0" baseline="0" noProof="0" dirty="0">
@@ -3800,7 +3800,7 @@
                 <a:ea typeface="+mn-ea"/>
                 <a:cs typeface="+mn-cs"/>
               </a:rPr>
-              <a:t> </a:t>
+              <a:t/>
             </a:r>
             <a:r>
               <a:rPr kumimoji="0" lang="en-US" sz="2000" b="0" i="0" u="none" strike="noStrike" kern="1200" cap="none" spc="0" normalizeH="0" baseline="0" noProof="0" dirty="0" err="1">
@@ -3817,7 +3817,7 @@
                 <a:ea typeface="+mn-ea"/>
                 <a:cs typeface="+mn-cs"/>
               </a:rPr>
-              <a:t>тордон</a:t>
+              <a:t/>
             </a:r>
             <a:r>
               <a:rPr kumimoji="0" lang="en-US" sz="2000" b="0" i="0" u="none" strike="noStrike" kern="1200" cap="none" spc="0" normalizeH="0" baseline="0" noProof="0" dirty="0">
@@ -3834,7 +3834,7 @@
                 <a:ea typeface="+mn-ea"/>
                 <a:cs typeface="+mn-cs"/>
               </a:rPr>
-              <a:t> </a:t>
+              <a:t/>
             </a:r>
             <a:r>
               <a:rPr kumimoji="0" lang="en-US" sz="1800" b="0" i="0" u="none" strike="noStrike" kern="1200" cap="none" spc="0" normalizeH="0" baseline="0" noProof="0" dirty="0" err="1">
@@ -3851,7 +3851,7 @@
                 <a:ea typeface="+mn-ea"/>
                 <a:cs typeface="+mn-cs"/>
               </a:rPr>
-              <a:t>тогуз</a:t>
+              <a:t/>
             </a:r>
             <a:r>
               <a:rPr kumimoji="0" lang="en-US" sz="1800" b="0" i="0" u="none" strike="noStrike" kern="1200" cap="none" spc="0" normalizeH="0" baseline="0" noProof="0" dirty="0">
@@ -3868,7 +3868,7 @@
                 <a:ea typeface="+mn-ea"/>
                 <a:cs typeface="+mn-cs"/>
               </a:rPr>
-              <a:t> </a:t>
+              <a:t/>
             </a:r>
             <a:r>
               <a:rPr kumimoji="0" lang="en-US" sz="1800" b="0" i="0" u="none" strike="noStrike" kern="1200" cap="none" spc="0" normalizeH="0" baseline="0" noProof="0" dirty="0" err="1">
@@ -3885,7 +3885,7 @@
                 <a:ea typeface="+mn-ea"/>
                 <a:cs typeface="+mn-cs"/>
               </a:rPr>
-              <a:t>жоопту</a:t>
+              <a:t/>
             </a:r>
             <a:r>
               <a:rPr kumimoji="0" lang="en-US" sz="1800" b="0" i="0" u="none" strike="noStrike" kern="1200" cap="none" spc="0" normalizeH="0" baseline="0" noProof="0" dirty="0">
@@ -3902,7 +3902,7 @@
                 <a:ea typeface="+mn-ea"/>
                 <a:cs typeface="+mn-cs"/>
               </a:rPr>
-              <a:t> </a:t>
+              <a:t/>
             </a:r>
             <a:r>
               <a:rPr kumimoji="0" lang="en-US" sz="1800" b="0" i="0" u="none" strike="noStrike" kern="1200" cap="none" spc="0" normalizeH="0" baseline="0" noProof="0" dirty="0" err="1">
@@ -3919,7 +3919,7 @@
                 <a:ea typeface="+mn-ea"/>
                 <a:cs typeface="+mn-cs"/>
               </a:rPr>
-              <a:t>тандап</a:t>
+              <a:t/>
             </a:r>
             <a:r>
               <a:rPr kumimoji="0" lang="en-US" sz="1800" b="0" i="0" u="none" strike="noStrike" kern="1200" cap="none" spc="0" normalizeH="0" baseline="0" noProof="0" dirty="0">
@@ -3936,7 +3936,7 @@
                 <a:ea typeface="+mn-ea"/>
                 <a:cs typeface="+mn-cs"/>
               </a:rPr>
-              <a:t>, </a:t>
+              <a:t/>
             </a:r>
             <a:r>
               <a:rPr kumimoji="0" lang="en-US" sz="1800" b="0" i="0" u="none" strike="noStrike" kern="1200" cap="none" spc="0" normalizeH="0" baseline="0" noProof="0" dirty="0" err="1">
@@ -3953,7 +3953,7 @@
                 <a:ea typeface="+mn-ea"/>
                 <a:cs typeface="+mn-cs"/>
               </a:rPr>
-              <a:t>аларды</a:t>
+              <a:t/>
             </a:r>
             <a:r>
               <a:rPr kumimoji="0" lang="en-US" sz="1800" b="0" i="0" u="none" strike="noStrike" kern="1200" cap="none" spc="0" normalizeH="0" baseline="0" noProof="0" dirty="0">
@@ -3970,7 +3970,7 @@
                 <a:ea typeface="+mn-ea"/>
                 <a:cs typeface="+mn-cs"/>
               </a:rPr>
-              <a:t> </a:t>
+              <a:t/>
             </a:r>
             <a:r>
               <a:rPr kumimoji="0" lang="ru-RU" sz="1800" b="0" i="0" u="none" strike="noStrike" kern="1200" cap="none" spc="0" normalizeH="0" baseline="0" noProof="0" dirty="0">
@@ -3987,7 +3987,7 @@
                 <a:ea typeface="+mn-ea"/>
                 <a:cs typeface="+mn-cs"/>
               </a:rPr>
-              <a:t>дептериндеги</a:t>
+              <a:t/>
             </a:r>
             <a:r>
               <a:rPr kumimoji="0" lang="en-US" sz="1800" b="0" i="0" u="none" strike="noStrike" kern="1200" cap="none" spc="0" normalizeH="0" baseline="0" noProof="0" dirty="0">
@@ -4004,7 +4004,7 @@
                 <a:ea typeface="+mn-ea"/>
                 <a:cs typeface="+mn-cs"/>
               </a:rPr>
-              <a:t> 3х3 </a:t>
+              <a:t/>
             </a:r>
             <a:r>
               <a:rPr kumimoji="0" lang="en-US" sz="1800" b="0" i="0" u="none" strike="noStrike" kern="1200" cap="none" spc="0" normalizeH="0" baseline="0" noProof="0" dirty="0" err="1">
@@ -4021,7 +4021,7 @@
                 <a:ea typeface="+mn-ea"/>
                 <a:cs typeface="+mn-cs"/>
               </a:rPr>
-              <a:t>квадратка</a:t>
+              <a:t/>
             </a:r>
             <a:r>
               <a:rPr kumimoji="0" lang="en-US" sz="1800" b="0" i="0" u="none" strike="noStrike" kern="1200" cap="none" spc="0" normalizeH="0" baseline="0" noProof="0" dirty="0">
@@ -4038,7 +4038,7 @@
                 <a:ea typeface="+mn-ea"/>
                 <a:cs typeface="+mn-cs"/>
               </a:rPr>
-              <a:t> </a:t>
+              <a:t/>
             </a:r>
             <a:r>
               <a:rPr kumimoji="0" lang="en-US" sz="1800" b="0" i="0" u="none" strike="noStrike" kern="1200" cap="none" spc="0" normalizeH="0" baseline="0" noProof="0" dirty="0" err="1">
@@ -4055,7 +4055,7 @@
                 <a:ea typeface="+mn-ea"/>
                 <a:cs typeface="+mn-cs"/>
               </a:rPr>
-              <a:t>туш</a:t>
+              <a:t/>
             </a:r>
             <a:r>
               <a:rPr kumimoji="0" lang="en-US" sz="1800" b="0" i="0" u="none" strike="noStrike" kern="1200" cap="none" spc="0" normalizeH="0" baseline="0" noProof="0" dirty="0">
@@ -4072,7 +4072,7 @@
                 <a:ea typeface="+mn-ea"/>
                 <a:cs typeface="+mn-cs"/>
               </a:rPr>
-              <a:t> </a:t>
+              <a:t/>
             </a:r>
             <a:r>
               <a:rPr kumimoji="0" lang="en-US" sz="1800" b="0" i="0" u="none" strike="noStrike" kern="1200" cap="none" spc="0" normalizeH="0" baseline="0" noProof="0" dirty="0" err="1">
@@ -4089,7 +4089,7 @@
                 <a:ea typeface="+mn-ea"/>
                 <a:cs typeface="+mn-cs"/>
               </a:rPr>
-              <a:t>келди</a:t>
+              <a:t/>
             </a:r>
             <a:r>
               <a:rPr kumimoji="0" lang="en-US" sz="1800" b="0" i="0" u="none" strike="noStrike" kern="1200" cap="none" spc="0" normalizeH="0" baseline="0" noProof="0" dirty="0">
@@ -4106,7 +4106,7 @@
                 <a:ea typeface="+mn-ea"/>
                 <a:cs typeface="+mn-cs"/>
               </a:rPr>
-              <a:t> </a:t>
+              <a:t/>
             </a:r>
             <a:r>
               <a:rPr kumimoji="0" lang="en-US" sz="1800" b="0" i="0" u="none" strike="noStrike" kern="1200" cap="none" spc="0" normalizeH="0" baseline="0" noProof="0" dirty="0" err="1">
@@ -4123,7 +4123,7 @@
                 <a:ea typeface="+mn-ea"/>
                 <a:cs typeface="+mn-cs"/>
               </a:rPr>
-              <a:t>жайгаштырышы</a:t>
+              <a:t/>
             </a:r>
             <a:r>
               <a:rPr kumimoji="0" lang="en-US" sz="1800" b="0" i="0" u="none" strike="noStrike" kern="1200" cap="none" spc="0" normalizeH="0" baseline="0" noProof="0" dirty="0">
@@ -4140,7 +4140,7 @@
                 <a:ea typeface="+mn-ea"/>
                 <a:cs typeface="+mn-cs"/>
               </a:rPr>
-              <a:t> </a:t>
+              <a:t/>
             </a:r>
             <a:r>
               <a:rPr kumimoji="0" lang="en-US" sz="1800" b="0" i="0" u="none" strike="noStrike" kern="1200" cap="none" spc="0" normalizeH="0" baseline="0" noProof="0" dirty="0" err="1">
@@ -4157,7 +4157,7 @@
                 <a:ea typeface="+mn-ea"/>
                 <a:cs typeface="+mn-cs"/>
               </a:rPr>
-              <a:t>керек</a:t>
+              <a:t/>
             </a:r>
             <a:r>
               <a:rPr kumimoji="0" lang="en-US" sz="1800" b="0" i="0" u="none" strike="noStrike" kern="1200" cap="none" spc="0" normalizeH="0" baseline="0" noProof="0" dirty="0">
@@ -4174,7 +4174,7 @@
                 <a:ea typeface="+mn-ea"/>
                 <a:cs typeface="+mn-cs"/>
               </a:rPr>
-              <a:t>.</a:t>
+              <a:t/>
             </a:r>
           </a:p>
           <a:p>
